--- a/slides/datasets-in-10-minutes-gpqa.pptx
+++ b/slides/datasets-in-10-minutes-gpqa.pptx
@@ -26,9 +26,7 @@
     <p:sldId id="274" r:id="rId24"/>
     <p:sldId id="275" r:id="rId25"/>
     <p:sldId id="276" r:id="rId26"/>
-    <p:sldId id="277" r:id="rId27"/>
     <p:sldId id="278" r:id="rId28"/>
-    <p:sldId id="279" r:id="rId29"/>
     <p:sldId id="280" r:id="rId30"/>
     <p:sldId id="281" r:id="rId31"/>
     <p:sldId id="282" r:id="rId32"/>
@@ -44,7 +42,6 @@
     <p:sldId id="292" r:id="rId42"/>
     <p:sldId id="293" r:id="rId43"/>
     <p:sldId id="294" r:id="rId44"/>
-    <p:sldId id="295" r:id="rId45"/>
     <p:sldId id="296" r:id="rId46"/>
     <p:sldId id="297" r:id="rId47"/>
     <p:sldId id="298" r:id="rId48"/>
@@ -54,7 +51,6 @@
     <p:sldId id="302" r:id="rId52"/>
     <p:sldId id="303" r:id="rId53"/>
     <p:sldId id="304" r:id="rId54"/>
-    <p:sldId id="305" r:id="rId55"/>
     <p:sldId id="306" r:id="rId56"/>
     <p:sldId id="307" r:id="rId57"/>
     <p:sldId id="308" r:id="rId58"/>
@@ -9166,7 +9162,7 @@
                 <a:ea typeface="Noto Sans CJK JP"/>
                 <a:cs typeface="Noto Sans"/>
               </a:rPr>
-              <a:t>この会話では、極性が似た化合物のスポットが重なり、分離しにくいことを指す。単語の直訳だけでは選びにくい。</a:t>
+              <a:t>この会話では、極性が似た化合物のスポットが重なり、分離しにくいことを指す。</a:t>
             </a:r>
           </a:p>
         </p:txBody>
@@ -11812,36 +11808,6 @@
               <a:t>化学の例では、実験室の言い回しを分離操作と結び付ける。生物の例では、解析結果が誤る仕組みを区別する。</a:t>
             </a:r>
           </a:p>
-          <a:p>
-            <a:pPr marL="457200" indent="-355600">
-              <a:lnSpc>
-                <a:spcPts val="2640"/>
-              </a:lnSpc>
-              <a:spcAft>
-                <a:spcPts val="0"/>
-              </a:spcAft>
-              <a:buSzPct val="60455"/>
-              <a:buFont typeface="Noto Sans CJK JP"/>
-              <a:buChar char="●"/>
-              <a:defRPr sz="2200" b="0">
-                <a:solidFill>
-                  <a:srgbClr val="303437"/>
-                </a:solidFill>
-                <a:latin typeface="Noto Sans"/>
-              </a:defRPr>
-            </a:pPr>
-            <a:r>
-              <a:rPr sz="2200" b="0" lang="ja-JP" altLang="en-US">
-                <a:solidFill>
-                  <a:srgbClr val="303437"/>
-                </a:solidFill>
-                <a:latin typeface="Noto Sans"/>
-                <a:ea typeface="Noto Sans CJK JP"/>
-                <a:cs typeface="Noto Sans"/>
-              </a:rPr>
-              <a:t>このように、設問の言葉と各分野の知識を対応させることが、選択式の正解率に反映される。</a:t>
-            </a:r>
-          </a:p>
         </p:txBody>
       </p:sp>
       <p:sp>
@@ -12239,36 +12205,6 @@
                 <a:cs typeface="Noto Sans"/>
               </a:rPr>
               <a:t>Diamond版198問を各1回評価するなら、正解率は「正解数 ÷ 198 × 100」。</a:t>
-            </a:r>
-          </a:p>
-          <a:p>
-            <a:pPr marL="457200" indent="-355600">
-              <a:lnSpc>
-                <a:spcPts val="2640"/>
-              </a:lnSpc>
-              <a:spcAft>
-                <a:spcPts val="0"/>
-              </a:spcAft>
-              <a:buSzPct val="60455"/>
-              <a:buFont typeface="Noto Sans CJK JP"/>
-              <a:buChar char="●"/>
-              <a:defRPr sz="2200" b="0">
-                <a:solidFill>
-                  <a:srgbClr val="303437"/>
-                </a:solidFill>
-                <a:latin typeface="Noto Sans"/>
-              </a:defRPr>
-            </a:pPr>
-            <a:r>
-              <a:rPr sz="2200" b="0" lang="ja-JP" altLang="en-US">
-                <a:solidFill>
-                  <a:srgbClr val="303437"/>
-                </a:solidFill>
-                <a:latin typeface="Noto Sans"/>
-                <a:ea typeface="Noto Sans CJK JP"/>
-                <a:cs typeface="Noto Sans"/>
-              </a:rPr>
-              <a:t>推論文が詳しくても、抽出された最終選択肢が違えば不正解になる。回答の抽出規則も評価条件に含まれる。</a:t>
             </a:r>
           </a:p>
         </p:txBody>
@@ -13467,7 +13403,7 @@
                 <a:ea typeface="Noto Sans CJK JP"/>
                 <a:cs typeface="Noto Sans"/>
               </a:rPr>
-              <a:t>GPT-4はRein et al.の分析ノート、他はOpenAI報告。プロンプト・推論設定は異なる。</a:t>
+              <a:t>GPT-4はRein et al.の分析ノート、他はOpenAI報告。</a:t>
             </a:r>
           </a:p>
         </p:txBody>
@@ -14205,7 +14141,7 @@
                 <a:ea typeface="Noto Sans CJK JP"/>
                 <a:cs typeface="Noto Sans"/>
               </a:rPr>
-              <a:t>2026-10-16の二次集約記録。Epoch AIの複数ランの平均値を掲載。個別の試行条件・一次CSVは未照合。</a:t>
+              <a:t>2026-10-16の二次集約記録。Epoch AIの複数ランの平均値を掲載。</a:t>
             </a:r>
           </a:p>
         </p:txBody>
@@ -14213,324 +14149,6 @@
       <p:sp>
         <p:nvSpPr>
           <p:cNvPr id="6" name="TextBox 5"/>
-          <p:cNvSpPr txBox="1"/>
-          <p:nvPr/>
-        </p:nvSpPr>
-        <p:spPr>
-          <a:xfrm>
-            <a:off x="502920" y="4690872"/>
-            <a:ext cx="8183879" cy="393192"/>
-          </a:xfrm>
-          <a:prstGeom prst="rect">
-            <a:avLst/>
-          </a:prstGeom>
-          <a:noFill/>
-        </p:spPr>
-        <p:txBody>
-          <a:bodyPr wrap="square" lIns="0" rIns="0" tIns="0" bIns="0">
-            <a:noAutofit/>
-          </a:bodyPr>
-          <a:lstStyle/>
-          <a:p>
-            <a:pPr algn="l">
-              <a:lnSpc>
-                <a:spcPct val="112000"/>
-              </a:lnSpc>
-              <a:spcBef>
-                <a:spcPts val="0"/>
-              </a:spcBef>
-              <a:spcAft>
-                <a:spcPts val="0"/>
-              </a:spcAft>
-              <a:buNone/>
-              <a:defRPr sz="810" b="0">
-                <a:solidFill>
-                  <a:srgbClr val="303437"/>
-                </a:solidFill>
-                <a:latin typeface="Noto Sans"/>
-              </a:defRPr>
-            </a:pPr>
-            <a:r>
-              <a:rPr sz="810" b="0" lang="ja-JP" altLang="en-US">
-                <a:solidFill>
-                  <a:srgbClr val="626669"/>
-                </a:solidFill>
-                <a:latin typeface="Noto Sans"/>
-                <a:ea typeface="Noto Sans CJK JP"/>
-                <a:cs typeface="Noto Sans"/>
-              </a:rPr>
-              <a:t/>
-            </a:r>
-            <a:r>
-              <a:rPr sz="810" b="0" lang="ja-JP" altLang="en-US">
-                <a:solidFill>
-                  <a:srgbClr val="626669"/>
-                </a:solidFill>
-                <a:latin typeface="Noto Sans"/>
-                <a:ea typeface="Noto Sans CJK JP"/>
-                <a:cs typeface="Noto Sans"/>
-              </a:rPr>
-              <a:t>Richard Donnell (2026). model-watch. Epoch AI集約値、2026-10-16の公開スナップショット。</a:t>
-            </a:r>
-          </a:p>
-          <a:p>
-            <a:pPr>
-              <a:lnSpc>
-                <a:spcPct val="112000"/>
-              </a:lnSpc>
-              <a:buNone/>
-              <a:defRPr sz="810" b="0">
-                <a:solidFill>
-                  <a:srgbClr val="303437"/>
-                </a:solidFill>
-                <a:latin typeface="Noto Sans"/>
-              </a:defRPr>
-            </a:pPr>
-            <a:r>
-              <a:rPr sz="810" b="0" lang="ja-JP" altLang="en-US">
-                <a:solidFill>
-                  <a:srgbClr val="626669"/>
-                </a:solidFill>
-                <a:latin typeface="Noto Sans"/>
-                <a:ea typeface="Noto Sans CJK JP"/>
-                <a:cs typeface="Noto Sans"/>
-                <a:hlinkClick r:id="rId2"/>
-              </a:rPr>
-              <a:t>https://github.com/richardadonnell/model-watch/blob/main/data/suggestions.json</a:t>
-            </a:r>
-          </a:p>
-        </p:txBody>
-      </p:sp>
-    </p:spTree>
-  </p:cSld>
-  <p:clrMapOvr>
-    <a:masterClrMapping/>
-  </p:clrMapOvr>
-</p:sld>
-</file>
-
-<file path=ppt/slides/slide22.xml><?xml version="1.0" encoding="utf-8"?>
-<p:sld xmlns:a="http://schemas.openxmlformats.org/drawingml/2006/main" xmlns:p="http://schemas.openxmlformats.org/presentationml/2006/main" xmlns:r="http://schemas.openxmlformats.org/officeDocument/2006/relationships">
-  <p:cSld>
-    <p:spTree>
-      <p:nvGrpSpPr>
-        <p:cNvPr id="1" name=""/>
-        <p:cNvGrpSpPr/>
-        <p:nvPr/>
-      </p:nvGrpSpPr>
-      <p:grpSpPr/>
-      <p:sp>
-        <p:nvSpPr>
-          <p:cNvPr id="2" name="Title 1"/>
-          <p:cNvSpPr>
-            <a:spLocks noGrp="1"/>
-          </p:cNvSpPr>
-          <p:nvPr>
-            <p:ph type="title"/>
-          </p:nvPr>
-        </p:nvSpPr>
-        <p:spPr>
-          <a:xfrm>
-            <a:off x="548640" y="786384"/>
-            <a:ext cx="8046720" cy="502920"/>
-          </a:xfrm>
-        </p:spPr>
-        <p:txBody>
-          <a:bodyPr wrap="square" lIns="0" rIns="0" tIns="0" bIns="0">
-            <a:noAutofit/>
-          </a:bodyPr>
-          <a:lstStyle/>
-          <a:p>
-            <a:pPr algn="l">
-              <a:lnSpc>
-                <a:spcPct val="110000"/>
-              </a:lnSpc>
-              <a:buNone/>
-              <a:defRPr sz="2800" b="0">
-                <a:solidFill>
-                  <a:srgbClr val="303437"/>
-                </a:solidFill>
-                <a:latin typeface="Noto Sans"/>
-              </a:defRPr>
-            </a:pPr>
-            <a:r>
-              <a:rPr sz="2800" b="1" lang="ja-JP" altLang="en-US">
-                <a:solidFill>
-                  <a:srgbClr val="303437"/>
-                </a:solidFill>
-                <a:latin typeface="Noto Sans"/>
-                <a:ea typeface="Noto Sans CJK JP"/>
-                <a:cs typeface="Noto Sans"/>
-              </a:rPr>
-              <a:t>高得点でも総合性能とは異なる</a:t>
-            </a:r>
-          </a:p>
-        </p:txBody>
-      </p:sp>
-      <p:sp>
-        <p:nvSpPr>
-          <p:cNvPr id="3" name="Text Placeholder 2"/>
-          <p:cNvSpPr>
-            <a:spLocks noGrp="1"/>
-          </p:cNvSpPr>
-          <p:nvPr>
-            <p:ph type="body" idx="1"/>
-          </p:nvPr>
-        </p:nvSpPr>
-        <p:spPr>
-          <a:xfrm>
-            <a:off x="594360" y="1463040"/>
-            <a:ext cx="7955279" cy="3090672"/>
-          </a:xfrm>
-        </p:spPr>
-        <p:txBody>
-          <a:bodyPr wrap="square" tIns="91440" bIns="91440">
-            <a:noAutofit/>
-          </a:bodyPr>
-          <a:lstStyle/>
-          <a:p>
-            <a:pPr marL="457200" indent="-355600">
-              <a:lnSpc>
-                <a:spcPts val="2640"/>
-              </a:lnSpc>
-              <a:spcAft>
-                <a:spcPts val="800"/>
-              </a:spcAft>
-              <a:buSzPct val="60455"/>
-              <a:buFont typeface="Noto Sans CJK JP"/>
-              <a:buChar char="●"/>
-              <a:defRPr sz="2200" b="0">
-                <a:solidFill>
-                  <a:srgbClr val="303437"/>
-                </a:solidFill>
-                <a:latin typeface="Noto Sans"/>
-              </a:defRPr>
-            </a:pPr>
-            <a:r>
-              <a:rPr sz="2200" b="0" lang="ja-JP" altLang="en-US">
-                <a:solidFill>
-                  <a:srgbClr val="303437"/>
-                </a:solidFill>
-                <a:latin typeface="Noto Sans"/>
-                <a:ea typeface="Noto Sans CJK JP"/>
-                <a:cs typeface="Noto Sans"/>
-              </a:rPr>
-              <a:t>公開評価には、GPT・Claude・Geminiの異なる系列が登場する。科学の四択課題での到達水準を比較する共通の対象になっている。</a:t>
-            </a:r>
-          </a:p>
-          <a:p>
-            <a:pPr marL="457200" indent="-355600">
-              <a:lnSpc>
-                <a:spcPts val="2640"/>
-              </a:lnSpc>
-              <a:spcAft>
-                <a:spcPts val="800"/>
-              </a:spcAft>
-              <a:buSzPct val="60455"/>
-              <a:buFont typeface="Noto Sans CJK JP"/>
-              <a:buChar char="●"/>
-              <a:defRPr sz="2200" b="0">
-                <a:solidFill>
-                  <a:srgbClr val="303437"/>
-                </a:solidFill>
-                <a:latin typeface="Noto Sans"/>
-              </a:defRPr>
-            </a:pPr>
-            <a:r>
-              <a:rPr sz="2200" b="0" lang="ja-JP" altLang="en-US">
-                <a:solidFill>
-                  <a:srgbClr val="303437"/>
-                </a:solidFill>
-                <a:latin typeface="Noto Sans"/>
-                <a:ea typeface="Noto Sans CJK JP"/>
-                <a:cs typeface="Noto Sans"/>
-              </a:rPr>
-              <a:t>一方、198問への正解率は、研究の実行、実験計画の妥当性、コードの修正能力を直接測る値ではない。</a:t>
-            </a:r>
-          </a:p>
-          <a:p>
-            <a:pPr marL="457200" indent="-355600">
-              <a:lnSpc>
-                <a:spcPts val="2640"/>
-              </a:lnSpc>
-              <a:spcAft>
-                <a:spcPts val="0"/>
-              </a:spcAft>
-              <a:buSzPct val="60455"/>
-              <a:buFont typeface="Noto Sans CJK JP"/>
-              <a:buChar char="●"/>
-              <a:defRPr sz="2200" b="0">
-                <a:solidFill>
-                  <a:srgbClr val="303437"/>
-                </a:solidFill>
-                <a:latin typeface="Noto Sans"/>
-              </a:defRPr>
-            </a:pPr>
-            <a:r>
-              <a:rPr sz="2200" b="0" lang="ja-JP" altLang="en-US">
-                <a:solidFill>
-                  <a:srgbClr val="303437"/>
-                </a:solidFill>
-                <a:latin typeface="Noto Sans"/>
-                <a:ea typeface="Noto Sans CJK JP"/>
-                <a:cs typeface="Noto Sans"/>
-              </a:rPr>
-              <a:t>モデルを選ぶ際は、用途に合う別の評価と、推論時間・費用も合わせて確認する。</a:t>
-            </a:r>
-          </a:p>
-        </p:txBody>
-      </p:sp>
-      <p:sp>
-        <p:nvSpPr>
-          <p:cNvPr id="4" name="Title 3"/>
-          <p:cNvSpPr>
-            <a:spLocks noGrp="1"/>
-          </p:cNvSpPr>
-          <p:nvPr>
-            <p:ph type="title" idx="2"/>
-          </p:nvPr>
-        </p:nvSpPr>
-        <p:spPr>
-          <a:xfrm>
-            <a:off x="75895" y="0"/>
-            <a:ext cx="8115300" cy="480060"/>
-          </a:xfrm>
-        </p:spPr>
-        <p:txBody>
-          <a:bodyPr wrap="square" lIns="0" rIns="0" tIns="0" bIns="0" anchor="ctr">
-            <a:noAutofit/>
-          </a:bodyPr>
-          <a:lstStyle/>
-          <a:p>
-            <a:pPr algn="l">
-              <a:lnSpc>
-                <a:spcPct val="110000"/>
-              </a:lnSpc>
-              <a:buNone/>
-              <a:defRPr sz="1400" b="0">
-                <a:solidFill>
-                  <a:srgbClr val="303437"/>
-                </a:solidFill>
-                <a:latin typeface="Noto Sans"/>
-              </a:defRPr>
-            </a:pPr>
-            <a:r>
-              <a:rPr sz="1400" b="1" lang="ja-JP" altLang="en-US">
-                <a:solidFill>
-                  <a:srgbClr val="FFFFFF"/>
-                </a:solidFill>
-                <a:latin typeface="Noto Sans"/>
-                <a:ea typeface="Noto Sans CJK JP"/>
-                <a:cs typeface="Noto Sans"/>
-              </a:rPr>
-              <a:t>2. 評価方法とモデルの成績</a:t>
-            </a:r>
-          </a:p>
-        </p:txBody>
-      </p:sp>
-      <p:sp>
-        <p:nvSpPr>
-          <p:cNvPr id="5" name="TextBox 4"/>
           <p:cNvSpPr txBox="1"/>
           <p:nvPr/>
         </p:nvSpPr>
@@ -14763,37 +14381,7 @@
                 <a:ea typeface="Noto Sans CJK JP"/>
                 <a:cs typeface="Noto Sans"/>
               </a:rPr>
-              <a:t>たとえば190問正解なら96.0%、189問なら95.5%。小数点の差が、少数の問題に由来することがある。</a:t>
-            </a:r>
-          </a:p>
-          <a:p>
-            <a:pPr marL="457200" indent="-355600">
-              <a:lnSpc>
-                <a:spcPts val="2640"/>
-              </a:lnSpc>
-              <a:spcAft>
-                <a:spcPts val="0"/>
-              </a:spcAft>
-              <a:buSzPct val="60455"/>
-              <a:buFont typeface="Noto Sans CJK JP"/>
-              <a:buChar char="●"/>
-              <a:defRPr sz="2200" b="0">
-                <a:solidFill>
-                  <a:srgbClr val="303437"/>
-                </a:solidFill>
-                <a:latin typeface="Noto Sans"/>
-              </a:defRPr>
-            </a:pPr>
-            <a:r>
-              <a:rPr sz="2200" b="0" lang="ja-JP" altLang="en-US">
-                <a:solidFill>
-                  <a:srgbClr val="303437"/>
-                </a:solidFill>
-                <a:latin typeface="Noto Sans"/>
-                <a:ea typeface="Noto Sans CJK JP"/>
-                <a:cs typeface="Noto Sans"/>
-              </a:rPr>
-              <a:t>回答の確率的な変動や、どの問題で失敗するかも確認する。少し高い平均値だけから、あらゆる用途で優れるとは判断できない。</a:t>
+              <a:t>たとえば190問正解なら96.0%、189問なら95.5%となる。</a:t>
             </a:r>
           </a:p>
         </p:txBody>
@@ -14930,321 +14518,6 @@
                 <a:hlinkClick r:id="rId2"/>
               </a:rPr>
               <a:t>https://github.com/idavidrein/gpqa/blob/main/dataset.zip</a:t>
-            </a:r>
-          </a:p>
-        </p:txBody>
-      </p:sp>
-    </p:spTree>
-  </p:cSld>
-  <p:clrMapOvr>
-    <a:masterClrMapping/>
-  </p:clrMapOvr>
-</p:sld>
-</file>
-
-<file path=ppt/slides/slide24.xml><?xml version="1.0" encoding="utf-8"?>
-<p:sld xmlns:a="http://schemas.openxmlformats.org/drawingml/2006/main" xmlns:p="http://schemas.openxmlformats.org/presentationml/2006/main" xmlns:r="http://schemas.openxmlformats.org/officeDocument/2006/relationships">
-  <p:cSld>
-    <p:spTree>
-      <p:nvGrpSpPr>
-        <p:cNvPr id="1" name=""/>
-        <p:cNvGrpSpPr/>
-        <p:nvPr/>
-      </p:nvGrpSpPr>
-      <p:grpSpPr/>
-      <p:sp>
-        <p:nvSpPr>
-          <p:cNvPr id="2" name="Title 1"/>
-          <p:cNvSpPr>
-            <a:spLocks noGrp="1"/>
-          </p:cNvSpPr>
-          <p:nvPr>
-            <p:ph type="title"/>
-          </p:nvPr>
-        </p:nvSpPr>
-        <p:spPr>
-          <a:xfrm>
-            <a:off x="548640" y="786384"/>
-            <a:ext cx="8046720" cy="502920"/>
-          </a:xfrm>
-        </p:spPr>
-        <p:txBody>
-          <a:bodyPr wrap="square" lIns="0" rIns="0" tIns="0" bIns="0">
-            <a:noAutofit/>
-          </a:bodyPr>
-          <a:lstStyle/>
-          <a:p>
-            <a:pPr algn="l">
-              <a:lnSpc>
-                <a:spcPct val="110000"/>
-              </a:lnSpc>
-              <a:buNone/>
-              <a:defRPr sz="2800" b="0">
-                <a:solidFill>
-                  <a:srgbClr val="303437"/>
-                </a:solidFill>
-                <a:latin typeface="Noto Sans"/>
-              </a:defRPr>
-            </a:pPr>
-            <a:r>
-              <a:rPr sz="2800" b="1" lang="ja-JP" altLang="en-US">
-                <a:solidFill>
-                  <a:srgbClr val="303437"/>
-                </a:solidFill>
-                <a:latin typeface="Noto Sans"/>
-                <a:ea typeface="Noto Sans CJK JP"/>
-                <a:cs typeface="Noto Sans"/>
-              </a:rPr>
-              <a:t>設定をそろえて結果を読む</a:t>
-            </a:r>
-          </a:p>
-        </p:txBody>
-      </p:sp>
-      <p:sp>
-        <p:nvSpPr>
-          <p:cNvPr id="3" name="Text Placeholder 2"/>
-          <p:cNvSpPr>
-            <a:spLocks noGrp="1"/>
-          </p:cNvSpPr>
-          <p:nvPr>
-            <p:ph type="body" idx="1"/>
-          </p:nvPr>
-        </p:nvSpPr>
-        <p:spPr>
-          <a:xfrm>
-            <a:off x="594360" y="1463040"/>
-            <a:ext cx="7955279" cy="3090672"/>
-          </a:xfrm>
-        </p:spPr>
-        <p:txBody>
-          <a:bodyPr wrap="square" tIns="91440" bIns="91440">
-            <a:noAutofit/>
-          </a:bodyPr>
-          <a:lstStyle/>
-          <a:p>
-            <a:pPr marL="457200" indent="-355600">
-              <a:lnSpc>
-                <a:spcPts val="2640"/>
-              </a:lnSpc>
-              <a:spcAft>
-                <a:spcPts val="800"/>
-              </a:spcAft>
-              <a:buSzPct val="60455"/>
-              <a:buFont typeface="Noto Sans CJK JP"/>
-              <a:buChar char="●"/>
-              <a:defRPr sz="2200" b="0">
-                <a:solidFill>
-                  <a:srgbClr val="303437"/>
-                </a:solidFill>
-                <a:latin typeface="Noto Sans"/>
-              </a:defRPr>
-            </a:pPr>
-            <a:r>
-              <a:rPr sz="2200" b="0" lang="ja-JP" altLang="en-US">
-                <a:solidFill>
-                  <a:srgbClr val="303437"/>
-                </a:solidFill>
-                <a:latin typeface="Noto Sans"/>
-                <a:ea typeface="Noto Sans CJK JP"/>
-                <a:cs typeface="Noto Sans"/>
-              </a:rPr>
-              <a:t>同じDiamond版でも、プロンプト、選択肢の並び、モデルの版、推論量、ツールの有無で評価条件が変わる。</a:t>
-            </a:r>
-          </a:p>
-          <a:p>
-            <a:pPr marL="457200" indent="-355600">
-              <a:lnSpc>
-                <a:spcPts val="2640"/>
-              </a:lnSpc>
-              <a:spcAft>
-                <a:spcPts val="800"/>
-              </a:spcAft>
-              <a:buSzPct val="60455"/>
-              <a:buFont typeface="Noto Sans CJK JP"/>
-              <a:buChar char="●"/>
-              <a:defRPr sz="2200" b="0">
-                <a:solidFill>
-                  <a:srgbClr val="303437"/>
-                </a:solidFill>
-                <a:latin typeface="Noto Sans"/>
-              </a:defRPr>
-            </a:pPr>
-            <a:r>
-              <a:rPr sz="2200" b="0" lang="ja-JP" altLang="en-US">
-                <a:solidFill>
-                  <a:srgbClr val="303437"/>
-                </a:solidFill>
-                <a:latin typeface="Noto Sans"/>
-                <a:ea typeface="Noto Sans CJK JP"/>
-                <a:cs typeface="Noto Sans"/>
-              </a:rPr>
-              <a:t>各問題を複数回解く平均正解率と、複数の回答から多数決で選ぶ成績は、別の手順である。</a:t>
-            </a:r>
-          </a:p>
-          <a:p>
-            <a:pPr marL="457200" indent="-355600">
-              <a:lnSpc>
-                <a:spcPts val="2640"/>
-              </a:lnSpc>
-              <a:spcAft>
-                <a:spcPts val="0"/>
-              </a:spcAft>
-              <a:buSzPct val="60455"/>
-              <a:buFont typeface="Noto Sans CJK JP"/>
-              <a:buChar char="●"/>
-              <a:defRPr sz="2200" b="0">
-                <a:solidFill>
-                  <a:srgbClr val="303437"/>
-                </a:solidFill>
-                <a:latin typeface="Noto Sans"/>
-              </a:defRPr>
-            </a:pPr>
-            <a:r>
-              <a:rPr sz="2200" b="0" lang="ja-JP" altLang="en-US">
-                <a:solidFill>
-                  <a:srgbClr val="303437"/>
-                </a:solidFill>
-                <a:latin typeface="Noto Sans"/>
-                <a:ea typeface="Noto Sans CJK JP"/>
-                <a:cs typeface="Noto Sans"/>
-              </a:rPr>
-              <a:t>比較では、同じ問題集合を使ったかに加え、各試行で何を許したかまで確かめる。</a:t>
-            </a:r>
-          </a:p>
-        </p:txBody>
-      </p:sp>
-      <p:sp>
-        <p:nvSpPr>
-          <p:cNvPr id="4" name="Title 3"/>
-          <p:cNvSpPr>
-            <a:spLocks noGrp="1"/>
-          </p:cNvSpPr>
-          <p:nvPr>
-            <p:ph type="title" idx="2"/>
-          </p:nvPr>
-        </p:nvSpPr>
-        <p:spPr>
-          <a:xfrm>
-            <a:off x="75895" y="0"/>
-            <a:ext cx="8115300" cy="480060"/>
-          </a:xfrm>
-        </p:spPr>
-        <p:txBody>
-          <a:bodyPr wrap="square" lIns="0" rIns="0" tIns="0" bIns="0" anchor="ctr">
-            <a:noAutofit/>
-          </a:bodyPr>
-          <a:lstStyle/>
-          <a:p>
-            <a:pPr algn="l">
-              <a:lnSpc>
-                <a:spcPct val="110000"/>
-              </a:lnSpc>
-              <a:buNone/>
-              <a:defRPr sz="1400" b="0">
-                <a:solidFill>
-                  <a:srgbClr val="303437"/>
-                </a:solidFill>
-                <a:latin typeface="Noto Sans"/>
-              </a:defRPr>
-            </a:pPr>
-            <a:r>
-              <a:rPr sz="1400" b="1" lang="ja-JP" altLang="en-US">
-                <a:solidFill>
-                  <a:srgbClr val="FFFFFF"/>
-                </a:solidFill>
-                <a:latin typeface="Noto Sans"/>
-                <a:ea typeface="Noto Sans CJK JP"/>
-                <a:cs typeface="Noto Sans"/>
-              </a:rPr>
-              <a:t>2. 評価方法とモデルの成績</a:t>
-            </a:r>
-          </a:p>
-        </p:txBody>
-      </p:sp>
-      <p:sp>
-        <p:nvSpPr>
-          <p:cNvPr id="5" name="TextBox 4"/>
-          <p:cNvSpPr txBox="1"/>
-          <p:nvPr/>
-        </p:nvSpPr>
-        <p:spPr>
-          <a:xfrm>
-            <a:off x="502920" y="4690872"/>
-            <a:ext cx="8183879" cy="393192"/>
-          </a:xfrm>
-          <a:prstGeom prst="rect">
-            <a:avLst/>
-          </a:prstGeom>
-          <a:noFill/>
-        </p:spPr>
-        <p:txBody>
-          <a:bodyPr wrap="square" lIns="0" rIns="0" tIns="0" bIns="0">
-            <a:noAutofit/>
-          </a:bodyPr>
-          <a:lstStyle/>
-          <a:p>
-            <a:pPr algn="l">
-              <a:lnSpc>
-                <a:spcPct val="112000"/>
-              </a:lnSpc>
-              <a:spcBef>
-                <a:spcPts val="0"/>
-              </a:spcBef>
-              <a:spcAft>
-                <a:spcPts val="0"/>
-              </a:spcAft>
-              <a:buNone/>
-              <a:defRPr sz="810" b="0">
-                <a:solidFill>
-                  <a:srgbClr val="303437"/>
-                </a:solidFill>
-                <a:latin typeface="Noto Sans"/>
-              </a:defRPr>
-            </a:pPr>
-            <a:r>
-              <a:rPr sz="810" b="0" lang="ja-JP" altLang="en-US">
-                <a:solidFill>
-                  <a:srgbClr val="626669"/>
-                </a:solidFill>
-                <a:latin typeface="Noto Sans"/>
-                <a:ea typeface="Noto Sans CJK JP"/>
-                <a:cs typeface="Noto Sans"/>
-              </a:rPr>
-              <a:t/>
-            </a:r>
-            <a:r>
-              <a:rPr sz="810" b="0" lang="ja-JP" altLang="en-US">
-                <a:solidFill>
-                  <a:srgbClr val="626669"/>
-                </a:solidFill>
-                <a:latin typeface="Noto Sans"/>
-                <a:ea typeface="Noto Sans CJK JP"/>
-                <a:cs typeface="Noto Sans"/>
-              </a:rPr>
-              <a:t>OpenAI (2025). simple-evals: gpqa_eval.py. GitHub公式評価実装。</a:t>
-            </a:r>
-            <a:r>
-              <a:rPr sz="810" b="0" lang="ja-JP" altLang="en-US">
-                <a:solidFill>
-                  <a:srgbClr val="626669"/>
-                </a:solidFill>
-                <a:latin typeface="Noto Sans"/>
-                <a:ea typeface="Noto Sans CJK JP"/>
-                <a:cs typeface="Noto Sans"/>
-              </a:rPr>
-              <a:t>  </a:t>
-            </a:r>
-            <a:r>
-              <a:rPr sz="810" b="0" lang="ja-JP" altLang="en-US">
-                <a:solidFill>
-                  <a:srgbClr val="626669"/>
-                </a:solidFill>
-                <a:latin typeface="Noto Sans"/>
-                <a:ea typeface="Noto Sans CJK JP"/>
-                <a:cs typeface="Noto Sans"/>
-                <a:hlinkClick r:id="rId2"/>
-              </a:rPr>
-              <a:t>https://github.com/openai/simple-evals/blob/main/gpqa_eval.py</a:t>
             </a:r>
           </a:p>
         </p:txBody>
@@ -15510,36 +14783,6 @@
               <a:t>専門家が問題と誤答候補を作り、専門家と分野外の回答者による検証を記録している。</a:t>
             </a:r>
           </a:p>
-          <a:p>
-            <a:pPr marL="457200" indent="-355600">
-              <a:lnSpc>
-                <a:spcPts val="2640"/>
-              </a:lnSpc>
-              <a:spcAft>
-                <a:spcPts val="0"/>
-              </a:spcAft>
-              <a:buSzPct val="60455"/>
-              <a:buFont typeface="Noto Sans CJK JP"/>
-              <a:buChar char="●"/>
-              <a:defRPr sz="2200" b="0">
-                <a:solidFill>
-                  <a:srgbClr val="303437"/>
-                </a:solidFill>
-                <a:latin typeface="Noto Sans"/>
-              </a:defRPr>
-            </a:pPr>
-            <a:r>
-              <a:rPr sz="2200" b="0" lang="ja-JP" altLang="en-US">
-                <a:solidFill>
-                  <a:srgbClr val="303437"/>
-                </a:solidFill>
-                <a:latin typeface="Noto Sans"/>
-                <a:ea typeface="Noto Sans CJK JP"/>
-                <a:cs typeface="Noto Sans"/>
-              </a:rPr>
-              <a:t>名前にかかわらず、将来のモデルや検索手法に対して、解けないことを保証するものではない。</a:t>
-            </a:r>
-          </a:p>
         </p:txBody>
       </p:sp>
       <p:sp>
@@ -17242,37 +16485,7 @@
             <a:noAutofit/>
           </a:bodyPr>
           <a:lstStyle/>
-          <a:p>
-            <a:pPr algn="l">
-              <a:lnSpc>
-                <a:spcPts val="2160"/>
-              </a:lnSpc>
-              <a:spcBef>
-                <a:spcPts val="0"/>
-              </a:spcBef>
-              <a:spcAft>
-                <a:spcPts val="0"/>
-              </a:spcAft>
-              <a:buNone/>
-              <a:defRPr sz="1800" b="0">
-                <a:solidFill>
-                  <a:srgbClr val="303437"/>
-                </a:solidFill>
-                <a:latin typeface="Noto Sans"/>
-              </a:defRPr>
-            </a:pPr>
-            <a:r>
-              <a:rPr sz="1800" b="0" lang="ja-JP" altLang="en-US">
-                <a:solidFill>
-                  <a:srgbClr val="303437"/>
-                </a:solidFill>
-                <a:latin typeface="Noto Sans"/>
-                <a:ea typeface="Noto Sans CJK JP"/>
-                <a:cs typeface="Noto Sans"/>
-              </a:rPr>
-              <a:t>同じRecord IDの包含関係を照合した。三つの集合を、独立した学習・開発・テスト分割とは扱わない。</a:t>
-            </a:r>
-          </a:p>
+          <a:p/>
         </p:txBody>
       </p:sp>
       <p:sp>
@@ -17424,7 +16637,7 @@
                 <a:ea typeface="Noto Sans CJK JP"/>
                 <a:cs typeface="Noto Sans"/>
               </a:rPr>
-              <a:t>Diamondは難問だけの順序ではない</a:t>
+              <a:t>Diamondを選ぶ専門家の検証記録</a:t>
             </a:r>
           </a:p>
         </p:txBody>
@@ -17477,7 +16690,7 @@
                 <a:ea typeface="Noto Sans CJK JP"/>
                 <a:cs typeface="Noto Sans"/>
               </a:rPr>
-              <a:t>Diamond版は、検証記録をもとに選ばれた部分集合である。単に全問題を難しい順に198問並べたものではない。</a:t>
+              <a:t>Diamond版は、検証記録をもとに選ばれた部分集合である。</a:t>
             </a:r>
           </a:p>
           <a:p>
@@ -17508,36 +16721,6 @@
                 <a:cs typeface="Noto Sans"/>
               </a:rPr>
               <a:t>配布CSVでは、Diamondの198問すべてで最初の専門家検証が正解し、2回目の専門家検証は161問で正解している。</a:t>
-            </a:r>
-          </a:p>
-          <a:p>
-            <a:pPr marL="457200" indent="-355600">
-              <a:lnSpc>
-                <a:spcPts val="2640"/>
-              </a:lnSpc>
-              <a:spcAft>
-                <a:spcPts val="0"/>
-              </a:spcAft>
-              <a:buSzPct val="60455"/>
-              <a:buFont typeface="Noto Sans CJK JP"/>
-              <a:buChar char="●"/>
-              <a:defRPr sz="2200" b="0">
-                <a:solidFill>
-                  <a:srgbClr val="303437"/>
-                </a:solidFill>
-                <a:latin typeface="Noto Sans"/>
-              </a:defRPr>
-            </a:pPr>
-            <a:r>
-              <a:rPr sz="2200" b="0" lang="ja-JP" altLang="en-US">
-                <a:solidFill>
-                  <a:srgbClr val="303437"/>
-                </a:solidFill>
-                <a:latin typeface="Noto Sans"/>
-                <a:ea typeface="Noto Sans CJK JP"/>
-                <a:cs typeface="Noto Sans"/>
-              </a:rPr>
-              <a:t>選抜に使った検証記録の正解率を、そのまま独立した人間の基準値として使うと、選抜の影響が含まれる。</a:t>
             </a:r>
           </a:p>
         </p:txBody>
@@ -19773,7 +18956,7 @@
                 <a:ea typeface="Noto Sans CJK JP"/>
                 <a:cs typeface="Noto Sans"/>
               </a:rPr>
-              <a:t>長さだけでは難しさは決まらない</a:t>
+              <a:t>Diamondの質問文の文字数</a:t>
             </a:r>
           </a:p>
         </p:txBody>
@@ -19827,66 +19010,6 @@
                 <a:cs typeface="Noto Sans"/>
               </a:rPr>
               <a:t>Diamond版の質問は、中央値379.5文字、最短80文字、最長1,642文字だった。内部の改行・数式の表記も文字として数えた。</a:t>
-            </a:r>
-          </a:p>
-          <a:p>
-            <a:pPr marL="457200" indent="-355600">
-              <a:lnSpc>
-                <a:spcPts val="2640"/>
-              </a:lnSpc>
-              <a:spcAft>
-                <a:spcPts val="800"/>
-              </a:spcAft>
-              <a:buSzPct val="60455"/>
-              <a:buFont typeface="Noto Sans CJK JP"/>
-              <a:buChar char="●"/>
-              <a:defRPr sz="2200" b="0">
-                <a:solidFill>
-                  <a:srgbClr val="303437"/>
-                </a:solidFill>
-                <a:latin typeface="Noto Sans"/>
-              </a:defRPr>
-            </a:pPr>
-            <a:r>
-              <a:rPr sz="2200" b="0" lang="ja-JP" altLang="en-US">
-                <a:solidFill>
-                  <a:srgbClr val="303437"/>
-                </a:solidFill>
-                <a:latin typeface="Noto Sans"/>
-                <a:ea typeface="Noto Sans CJK JP"/>
-                <a:cs typeface="Noto Sans"/>
-              </a:rPr>
-              <a:t>短い質問でも、実験室の慣行や複数の概念を知らなければ選べない。長い設問は、条件を整理する負荷も加わる。</a:t>
-            </a:r>
-          </a:p>
-          <a:p>
-            <a:pPr marL="457200" indent="-355600">
-              <a:lnSpc>
-                <a:spcPts val="2640"/>
-              </a:lnSpc>
-              <a:spcAft>
-                <a:spcPts val="0"/>
-              </a:spcAft>
-              <a:buSzPct val="60455"/>
-              <a:buFont typeface="Noto Sans CJK JP"/>
-              <a:buChar char="●"/>
-              <a:defRPr sz="2200" b="0">
-                <a:solidFill>
-                  <a:srgbClr val="303437"/>
-                </a:solidFill>
-                <a:latin typeface="Noto Sans"/>
-              </a:defRPr>
-            </a:pPr>
-            <a:r>
-              <a:rPr sz="2200" b="0" lang="ja-JP" altLang="en-US">
-                <a:solidFill>
-                  <a:srgbClr val="303437"/>
-                </a:solidFill>
-                <a:latin typeface="Noto Sans"/>
-                <a:ea typeface="Noto Sans CJK JP"/>
-                <a:cs typeface="Noto Sans"/>
-              </a:rPr>
-              <a:t>分野や設問形式と合わせて、どの種類の問題で成績が落ちるかを調べると、総合正解率を補える。</a:t>
             </a:r>
           </a:p>
         </p:txBody>
@@ -20288,36 +19411,6 @@
               <a:t>候補を並べ替えた後、その並びに対応する正答ラベルを作る。CSV内のCorrect Answerを常にAにすると、位置が手掛かりになる。</a:t>
             </a:r>
           </a:p>
-          <a:p>
-            <a:pPr marL="457200" indent="-355600">
-              <a:lnSpc>
-                <a:spcPts val="2640"/>
-              </a:lnSpc>
-              <a:spcAft>
-                <a:spcPts val="0"/>
-              </a:spcAft>
-              <a:buSzPct val="60455"/>
-              <a:buFont typeface="Noto Sans CJK JP"/>
-              <a:buChar char="●"/>
-              <a:defRPr sz="2200" b="0">
-                <a:solidFill>
-                  <a:srgbClr val="303437"/>
-                </a:solidFill>
-                <a:latin typeface="Noto Sans"/>
-              </a:defRPr>
-            </a:pPr>
-            <a:r>
-              <a:rPr sz="2200" b="0" lang="ja-JP" altLang="en-US">
-                <a:solidFill>
-                  <a:srgbClr val="303437"/>
-                </a:solidFill>
-                <a:latin typeface="Noto Sans"/>
-                <a:ea typeface="Noto Sans CJK JP"/>
-                <a:cs typeface="Noto Sans"/>
-              </a:rPr>
-              <a:t>評価用の正解・解説は採点側に保持し、プロンプトへ混ぜない。</a:t>
-            </a:r>
-          </a:p>
         </p:txBody>
       </p:sp>
       <p:sp>
@@ -20517,7 +19610,7 @@
                 <a:ea typeface="Noto Sans CJK JP"/>
                 <a:cs typeface="Noto Sans"/>
               </a:rPr>
-              <a:t>反復回数と問題数を区別する</a:t>
+              <a:t>公式実装は198問を各4回評価する</a:t>
             </a:r>
           </a:p>
         </p:txBody>
@@ -20600,37 +19693,7 @@
                 <a:ea typeface="Noto Sans CJK JP"/>
                 <a:cs typeface="Noto Sans"/>
               </a:rPr>
-              <a:t>各応答は一つの選択肢として採点される。既定の処理は、4回答を多数決でまとめる評価ではない。</a:t>
-            </a:r>
-          </a:p>
-          <a:p>
-            <a:pPr marL="457200" indent="-355600">
-              <a:lnSpc>
-                <a:spcPts val="2640"/>
-              </a:lnSpc>
-              <a:spcAft>
-                <a:spcPts val="0"/>
-              </a:spcAft>
-              <a:buSzPct val="60455"/>
-              <a:buFont typeface="Noto Sans CJK JP"/>
-              <a:buChar char="●"/>
-              <a:defRPr sz="2200" b="0">
-                <a:solidFill>
-                  <a:srgbClr val="303437"/>
-                </a:solidFill>
-                <a:latin typeface="Noto Sans"/>
-              </a:defRPr>
-            </a:pPr>
-            <a:r>
-              <a:rPr sz="2200" b="0" lang="ja-JP" altLang="en-US">
-                <a:solidFill>
-                  <a:srgbClr val="303437"/>
-                </a:solidFill>
-                <a:latin typeface="Noto Sans"/>
-                <a:ea typeface="Noto Sans CJK JP"/>
-                <a:cs typeface="Noto Sans"/>
-              </a:rPr>
-              <a:t>792応答があっても、異なる科学問題が792問に増えるわけではない。問題ごとの失敗も別に集計する。</a:t>
+              <a:t>各応答は一つの選択肢として採点され、792応答の平均正解率を求める。</a:t>
             </a:r>
           </a:p>
         </p:txBody>
@@ -20916,36 +19979,6 @@
                 <a:cs typeface="Noto Sans"/>
               </a:rPr>
               <a:t>GPQAの配布データには、学習混入の検知に使うcanary文字列が含まれる。除外・重複検査の手掛かりにする。</a:t>
-            </a:r>
-          </a:p>
-          <a:p>
-            <a:pPr marL="457200" indent="-355600">
-              <a:lnSpc>
-                <a:spcPts val="2640"/>
-              </a:lnSpc>
-              <a:spcAft>
-                <a:spcPts val="0"/>
-              </a:spcAft>
-              <a:buSzPct val="60455"/>
-              <a:buFont typeface="Noto Sans CJK JP"/>
-              <a:buChar char="●"/>
-              <a:defRPr sz="2200" b="0">
-                <a:solidFill>
-                  <a:srgbClr val="303437"/>
-                </a:solidFill>
-                <a:latin typeface="Noto Sans"/>
-              </a:defRPr>
-            </a:pPr>
-            <a:r>
-              <a:rPr sz="2200" b="0" lang="ja-JP" altLang="en-US">
-                <a:solidFill>
-                  <a:srgbClr val="303437"/>
-                </a:solidFill>
-                <a:latin typeface="Noto Sans"/>
-                <a:ea typeface="Noto Sans CJK JP"/>
-                <a:cs typeface="Noto Sans"/>
-              </a:rPr>
-              <a:t>公開問題での高得点だけで、未公開の科学課題への汎化が同じ水準だとは結論できない。</a:t>
             </a:r>
           </a:p>
         </p:txBody>
@@ -22517,7 +21550,7 @@
 </p:sld>
 </file>
 
-<file path=ppt/slides/slide40.xml><?xml version="1.0" encoding="utf-8"?>
+<file path=ppt/slides/slide41.xml><?xml version="1.0" encoding="utf-8"?>
 <p:sld xmlns:a="http://schemas.openxmlformats.org/drawingml/2006/main" xmlns:p="http://schemas.openxmlformats.org/presentationml/2006/main" xmlns:r="http://schemas.openxmlformats.org/officeDocument/2006/relationships">
   <p:cSld>
     <p:spTree>
@@ -22570,7 +21603,7 @@
                 <a:ea typeface="Noto Sans CJK JP"/>
                 <a:cs typeface="Noto Sans"/>
               </a:rPr>
-              <a:t>GPQAを使う場面と補う評価</a:t>
+              <a:t>GPQAの特徴を整理する</a:t>
             </a:r>
           </a:p>
         </p:txBody>
@@ -22623,7 +21656,7 @@
                 <a:ea typeface="Noto Sans CJK JP"/>
                 <a:cs typeface="Noto Sans"/>
               </a:rPr>
-              <a:t>GPQAは、科学分野の条件付き四択問題に答える能力を調べるときに使いやすい。</a:t>
+              <a:t>専門家が作成・検証した、生物・化学・物理の英語四択問題。検索だけでは答えにくい課題を目指して作られた。</a:t>
             </a:r>
           </a:p>
           <a:p>
@@ -22653,352 +21686,7 @@
                 <a:ea typeface="Noto Sans CJK JP"/>
                 <a:cs typeface="Noto Sans"/>
               </a:rPr>
-              <a:t>研究支援を評価するなら、文献を正しく引用できるか、実験計画が実行可能か、計算結果を再現できるかも確かめる。</a:t>
-            </a:r>
-          </a:p>
-          <a:p>
-            <a:pPr marL="457200" indent="-355600">
-              <a:lnSpc>
-                <a:spcPts val="2640"/>
-              </a:lnSpc>
-              <a:spcAft>
-                <a:spcPts val="0"/>
-              </a:spcAft>
-              <a:buSzPct val="60455"/>
-              <a:buFont typeface="Noto Sans CJK JP"/>
-              <a:buChar char="●"/>
-              <a:defRPr sz="2200" b="0">
-                <a:solidFill>
-                  <a:srgbClr val="303437"/>
-                </a:solidFill>
-                <a:latin typeface="Noto Sans"/>
-              </a:defRPr>
-            </a:pPr>
-            <a:r>
-              <a:rPr sz="2200" b="0" lang="ja-JP" altLang="en-US">
-                <a:solidFill>
-                  <a:srgbClr val="303437"/>
-                </a:solidFill>
-                <a:latin typeface="Noto Sans"/>
-                <a:ea typeface="Noto Sans CJK JP"/>
-                <a:cs typeface="Noto Sans"/>
-              </a:rPr>
-              <a:t>用途ごとの確認を加えることで、公開ベンチマークの正解率と、実際に任せたい仕事をつなげられる。</a:t>
-            </a:r>
-          </a:p>
-        </p:txBody>
-      </p:sp>
-      <p:sp>
-        <p:nvSpPr>
-          <p:cNvPr id="4" name="Title 3"/>
-          <p:cNvSpPr>
-            <a:spLocks noGrp="1"/>
-          </p:cNvSpPr>
-          <p:nvPr>
-            <p:ph type="title" idx="2"/>
-          </p:nvPr>
-        </p:nvSpPr>
-        <p:spPr>
-          <a:xfrm>
-            <a:off x="75895" y="0"/>
-            <a:ext cx="8115300" cy="480060"/>
-          </a:xfrm>
-        </p:spPr>
-        <p:txBody>
-          <a:bodyPr wrap="square" lIns="0" rIns="0" tIns="0" bIns="0" anchor="ctr">
-            <a:noAutofit/>
-          </a:bodyPr>
-          <a:lstStyle/>
-          <a:p>
-            <a:pPr algn="l">
-              <a:lnSpc>
-                <a:spcPct val="110000"/>
-              </a:lnSpc>
-              <a:buNone/>
-              <a:defRPr sz="1400" b="0">
-                <a:solidFill>
-                  <a:srgbClr val="303437"/>
-                </a:solidFill>
-                <a:latin typeface="Noto Sans"/>
-              </a:defRPr>
-            </a:pPr>
-            <a:r>
-              <a:rPr sz="1400" b="1" lang="ja-JP" altLang="en-US">
-                <a:solidFill>
-                  <a:srgbClr val="FFFFFF"/>
-                </a:solidFill>
-                <a:latin typeface="Noto Sans"/>
-                <a:ea typeface="Noto Sans CJK JP"/>
-                <a:cs typeface="Noto Sans"/>
-              </a:rPr>
-              <a:t>4. 評価での利用と入手方法</a:t>
-            </a:r>
-          </a:p>
-        </p:txBody>
-      </p:sp>
-      <p:sp>
-        <p:nvSpPr>
-          <p:cNvPr id="5" name="TextBox 4"/>
-          <p:cNvSpPr txBox="1"/>
-          <p:nvPr/>
-        </p:nvSpPr>
-        <p:spPr>
-          <a:xfrm>
-            <a:off x="502920" y="4690872"/>
-            <a:ext cx="8183879" cy="393192"/>
-          </a:xfrm>
-          <a:prstGeom prst="rect">
-            <a:avLst/>
-          </a:prstGeom>
-          <a:noFill/>
-        </p:spPr>
-        <p:txBody>
-          <a:bodyPr wrap="square" lIns="0" rIns="0" tIns="0" bIns="0">
-            <a:noAutofit/>
-          </a:bodyPr>
-          <a:lstStyle/>
-          <a:p>
-            <a:pPr algn="l">
-              <a:lnSpc>
-                <a:spcPct val="112000"/>
-              </a:lnSpc>
-              <a:spcBef>
-                <a:spcPts val="0"/>
-              </a:spcBef>
-              <a:spcAft>
-                <a:spcPts val="0"/>
-              </a:spcAft>
-              <a:buNone/>
-              <a:defRPr sz="810" b="0">
-                <a:solidFill>
-                  <a:srgbClr val="303437"/>
-                </a:solidFill>
-                <a:latin typeface="Noto Sans"/>
-              </a:defRPr>
-            </a:pPr>
-            <a:r>
-              <a:rPr sz="810" b="0" lang="ja-JP" altLang="en-US">
-                <a:solidFill>
-                  <a:srgbClr val="626669"/>
-                </a:solidFill>
-                <a:latin typeface="Noto Sans"/>
-                <a:ea typeface="Noto Sans CJK JP"/>
-                <a:cs typeface="Noto Sans"/>
-              </a:rPr>
-              <a:t/>
-            </a:r>
-            <a:r>
-              <a:rPr sz="810" b="0" lang="ja-JP" altLang="en-US">
-                <a:solidFill>
-                  <a:srgbClr val="626669"/>
-                </a:solidFill>
-                <a:latin typeface="Noto Sans"/>
-                <a:ea typeface="Noto Sans CJK JP"/>
-                <a:cs typeface="Noto Sans"/>
-              </a:rPr>
-              <a:t>Rein et al. (2024). GPQA: A Graduate-Level Google-Proof Q&amp;A Benchmark. COLM.</a:t>
-            </a:r>
-            <a:r>
-              <a:rPr sz="810" b="0" lang="ja-JP" altLang="en-US">
-                <a:solidFill>
-                  <a:srgbClr val="626669"/>
-                </a:solidFill>
-                <a:latin typeface="Noto Sans"/>
-                <a:ea typeface="Noto Sans CJK JP"/>
-                <a:cs typeface="Noto Sans"/>
-              </a:rPr>
-              <a:t>  </a:t>
-            </a:r>
-            <a:r>
-              <a:rPr sz="810" b="0" lang="ja-JP" altLang="en-US">
-                <a:solidFill>
-                  <a:srgbClr val="626669"/>
-                </a:solidFill>
-                <a:latin typeface="Noto Sans"/>
-                <a:ea typeface="Noto Sans CJK JP"/>
-                <a:cs typeface="Noto Sans"/>
-                <a:hlinkClick r:id="rId2"/>
-              </a:rPr>
-              <a:t>https://github.com/idavidrein/gpqa</a:t>
-            </a:r>
-          </a:p>
-        </p:txBody>
-      </p:sp>
-    </p:spTree>
-  </p:cSld>
-  <p:clrMapOvr>
-    <a:masterClrMapping/>
-  </p:clrMapOvr>
-</p:sld>
-</file>
-
-<file path=ppt/slides/slide41.xml><?xml version="1.0" encoding="utf-8"?>
-<p:sld xmlns:a="http://schemas.openxmlformats.org/drawingml/2006/main" xmlns:p="http://schemas.openxmlformats.org/presentationml/2006/main" xmlns:r="http://schemas.openxmlformats.org/officeDocument/2006/relationships">
-  <p:cSld>
-    <p:spTree>
-      <p:nvGrpSpPr>
-        <p:cNvPr id="1" name=""/>
-        <p:cNvGrpSpPr/>
-        <p:nvPr/>
-      </p:nvGrpSpPr>
-      <p:grpSpPr/>
-      <p:sp>
-        <p:nvSpPr>
-          <p:cNvPr id="2" name="Title 1"/>
-          <p:cNvSpPr>
-            <a:spLocks noGrp="1"/>
-          </p:cNvSpPr>
-          <p:nvPr>
-            <p:ph type="title"/>
-          </p:nvPr>
-        </p:nvSpPr>
-        <p:spPr>
-          <a:xfrm>
-            <a:off x="548640" y="786384"/>
-            <a:ext cx="8046720" cy="502920"/>
-          </a:xfrm>
-        </p:spPr>
-        <p:txBody>
-          <a:bodyPr wrap="square" lIns="0" rIns="0" tIns="0" bIns="0">
-            <a:noAutofit/>
-          </a:bodyPr>
-          <a:lstStyle/>
-          <a:p>
-            <a:pPr algn="l">
-              <a:lnSpc>
-                <a:spcPct val="110000"/>
-              </a:lnSpc>
-              <a:buNone/>
-              <a:defRPr sz="2800" b="0">
-                <a:solidFill>
-                  <a:srgbClr val="303437"/>
-                </a:solidFill>
-                <a:latin typeface="Noto Sans"/>
-              </a:defRPr>
-            </a:pPr>
-            <a:r>
-              <a:rPr sz="2800" b="1" lang="ja-JP" altLang="en-US">
-                <a:solidFill>
-                  <a:srgbClr val="303437"/>
-                </a:solidFill>
-                <a:latin typeface="Noto Sans"/>
-                <a:ea typeface="Noto Sans CJK JP"/>
-                <a:cs typeface="Noto Sans"/>
-              </a:rPr>
-              <a:t>GPQAの特徴を整理する</a:t>
-            </a:r>
-          </a:p>
-        </p:txBody>
-      </p:sp>
-      <p:sp>
-        <p:nvSpPr>
-          <p:cNvPr id="3" name="Text Placeholder 2"/>
-          <p:cNvSpPr>
-            <a:spLocks noGrp="1"/>
-          </p:cNvSpPr>
-          <p:nvPr>
-            <p:ph type="body" idx="1"/>
-          </p:nvPr>
-        </p:nvSpPr>
-        <p:spPr>
-          <a:xfrm>
-            <a:off x="594360" y="1463040"/>
-            <a:ext cx="7955279" cy="3090672"/>
-          </a:xfrm>
-        </p:spPr>
-        <p:txBody>
-          <a:bodyPr wrap="square" tIns="91440" bIns="91440">
-            <a:noAutofit/>
-          </a:bodyPr>
-          <a:lstStyle/>
-          <a:p>
-            <a:pPr marL="457200" indent="-355600">
-              <a:lnSpc>
-                <a:spcPts val="2640"/>
-              </a:lnSpc>
-              <a:spcAft>
-                <a:spcPts val="800"/>
-              </a:spcAft>
-              <a:buSzPct val="60455"/>
-              <a:buFont typeface="Noto Sans CJK JP"/>
-              <a:buChar char="●"/>
-              <a:defRPr sz="2200" b="0">
-                <a:solidFill>
-                  <a:srgbClr val="303437"/>
-                </a:solidFill>
-                <a:latin typeface="Noto Sans"/>
-              </a:defRPr>
-            </a:pPr>
-            <a:r>
-              <a:rPr sz="2200" b="0" lang="ja-JP" altLang="en-US">
-                <a:solidFill>
-                  <a:srgbClr val="303437"/>
-                </a:solidFill>
-                <a:latin typeface="Noto Sans"/>
-                <a:ea typeface="Noto Sans CJK JP"/>
-                <a:cs typeface="Noto Sans"/>
-              </a:rPr>
-              <a:t>専門家が作成・検証した、生物・化学・物理の英語四択問題。検索だけでは答えにくい課題を目指して作られた。</a:t>
-            </a:r>
-          </a:p>
-          <a:p>
-            <a:pPr marL="457200" indent="-355600">
-              <a:lnSpc>
-                <a:spcPts val="2640"/>
-              </a:lnSpc>
-              <a:spcAft>
-                <a:spcPts val="800"/>
-              </a:spcAft>
-              <a:buSzPct val="60455"/>
-              <a:buFont typeface="Noto Sans CJK JP"/>
-              <a:buChar char="●"/>
-              <a:defRPr sz="2200" b="0">
-                <a:solidFill>
-                  <a:srgbClr val="303437"/>
-                </a:solidFill>
-                <a:latin typeface="Noto Sans"/>
-              </a:defRPr>
-            </a:pPr>
-            <a:r>
-              <a:rPr sz="2200" b="0" lang="ja-JP" altLang="en-US">
-                <a:solidFill>
-                  <a:srgbClr val="303437"/>
-                </a:solidFill>
-                <a:latin typeface="Noto Sans"/>
-                <a:ea typeface="Noto Sans CJK JP"/>
-                <a:cs typeface="Noto Sans"/>
-              </a:rPr>
-              <a:t>現行の公開評価でもDiamond版198問が使われる。全546問のExtended版と、評価対象を区別する。</a:t>
-            </a:r>
-          </a:p>
-          <a:p>
-            <a:pPr marL="457200" indent="-355600">
-              <a:lnSpc>
-                <a:spcPts val="2640"/>
-              </a:lnSpc>
-              <a:spcAft>
-                <a:spcPts val="0"/>
-              </a:spcAft>
-              <a:buSzPct val="60455"/>
-              <a:buFont typeface="Noto Sans CJK JP"/>
-              <a:buChar char="●"/>
-              <a:defRPr sz="2200" b="0">
-                <a:solidFill>
-                  <a:srgbClr val="303437"/>
-                </a:solidFill>
-                <a:latin typeface="Noto Sans"/>
-              </a:defRPr>
-            </a:pPr>
-            <a:r>
-              <a:rPr sz="2200" b="0" lang="ja-JP" altLang="en-US">
-                <a:solidFill>
-                  <a:srgbClr val="303437"/>
-                </a:solidFill>
-                <a:latin typeface="Noto Sans"/>
-                <a:ea typeface="Noto Sans CJK JP"/>
-                <a:cs typeface="Noto Sans"/>
-              </a:rPr>
-              <a:t>成績を読むときは、推論設定、選択肢の並び、公開問題への混入、分野の偏りを一緒に確認する。</a:t>
+              <a:t>現行の公開評価では、全546問のExtended版から選ばれたDiamond版198問が使われる。</a:t>
             </a:r>
           </a:p>
         </p:txBody>
@@ -24813,37 +23501,7 @@
             <a:noAutofit/>
           </a:bodyPr>
           <a:lstStyle/>
-          <a:p>
-            <a:pPr algn="l">
-              <a:lnSpc>
-                <a:spcPts val="2160"/>
-              </a:lnSpc>
-              <a:spcBef>
-                <a:spcPts val="0"/>
-              </a:spcBef>
-              <a:spcAft>
-                <a:spcPts val="0"/>
-              </a:spcAft>
-              <a:buNone/>
-              <a:defRPr sz="1800" b="0">
-                <a:solidFill>
-                  <a:srgbClr val="303437"/>
-                </a:solidFill>
-                <a:latin typeface="Noto Sans"/>
-              </a:defRPr>
-            </a:pPr>
-            <a:r>
-              <a:rPr sz="1800" b="0" lang="ja-JP" altLang="en-US">
-                <a:solidFill>
-                  <a:srgbClr val="303437"/>
-                </a:solidFill>
-                <a:latin typeface="Noto Sans"/>
-                <a:ea typeface="Noto Sans CJK JP"/>
-                <a:cs typeface="Noto Sans"/>
-              </a:rPr>
-              <a:t>同じ質問が複数の集合に含まれる。各列を足して問題数を合算しない。</a:t>
-            </a:r>
-          </a:p>
+          <a:p/>
         </p:txBody>
       </p:sp>
       <p:sp>
@@ -28672,321 +27330,6 @@
 </p:sld>
 </file>
 
-<file path=ppt/slides/slide50.xml><?xml version="1.0" encoding="utf-8"?>
-<p:sld xmlns:a="http://schemas.openxmlformats.org/drawingml/2006/main" xmlns:p="http://schemas.openxmlformats.org/presentationml/2006/main" xmlns:r="http://schemas.openxmlformats.org/officeDocument/2006/relationships">
-  <p:cSld>
-    <p:spTree>
-      <p:nvGrpSpPr>
-        <p:cNvPr id="1" name=""/>
-        <p:cNvGrpSpPr/>
-        <p:nvPr/>
-      </p:nvGrpSpPr>
-      <p:grpSpPr/>
-      <p:sp>
-        <p:nvSpPr>
-          <p:cNvPr id="2" name="Title 1"/>
-          <p:cNvSpPr>
-            <a:spLocks noGrp="1"/>
-          </p:cNvSpPr>
-          <p:nvPr>
-            <p:ph type="title"/>
-          </p:nvPr>
-        </p:nvSpPr>
-        <p:spPr>
-          <a:xfrm>
-            <a:off x="548640" y="786384"/>
-            <a:ext cx="8046720" cy="502920"/>
-          </a:xfrm>
-        </p:spPr>
-        <p:txBody>
-          <a:bodyPr wrap="square" lIns="0" rIns="0" tIns="0" bIns="0">
-            <a:noAutofit/>
-          </a:bodyPr>
-          <a:lstStyle/>
-          <a:p>
-            <a:pPr algn="l">
-              <a:lnSpc>
-                <a:spcPct val="110000"/>
-              </a:lnSpc>
-              <a:buNone/>
-              <a:defRPr sz="2800" b="0">
-                <a:solidFill>
-                  <a:srgbClr val="303437"/>
-                </a:solidFill>
-                <a:latin typeface="Noto Sans"/>
-              </a:defRPr>
-            </a:pPr>
-            <a:r>
-              <a:rPr sz="2800" b="1" lang="ja-JP" altLang="en-US">
-                <a:solidFill>
-                  <a:srgbClr val="303437"/>
-                </a:solidFill>
-                <a:latin typeface="Noto Sans"/>
-                <a:ea typeface="Noto Sans CJK JP"/>
-                <a:cs typeface="Noto Sans"/>
-              </a:rPr>
-              <a:t>人間の基準値にも条件がある</a:t>
-            </a:r>
-          </a:p>
-        </p:txBody>
-      </p:sp>
-      <p:sp>
-        <p:nvSpPr>
-          <p:cNvPr id="3" name="Text Placeholder 2"/>
-          <p:cNvSpPr>
-            <a:spLocks noGrp="1"/>
-          </p:cNvSpPr>
-          <p:nvPr>
-            <p:ph type="body" idx="1"/>
-          </p:nvPr>
-        </p:nvSpPr>
-        <p:spPr>
-          <a:xfrm>
-            <a:off x="594360" y="1463040"/>
-            <a:ext cx="7955279" cy="3090672"/>
-          </a:xfrm>
-        </p:spPr>
-        <p:txBody>
-          <a:bodyPr wrap="square" tIns="91440" bIns="91440">
-            <a:noAutofit/>
-          </a:bodyPr>
-          <a:lstStyle/>
-          <a:p>
-            <a:pPr marL="457200" indent="-355600">
-              <a:lnSpc>
-                <a:spcPts val="2640"/>
-              </a:lnSpc>
-              <a:spcAft>
-                <a:spcPts val="800"/>
-              </a:spcAft>
-              <a:buSzPct val="60455"/>
-              <a:buFont typeface="Noto Sans CJK JP"/>
-              <a:buChar char="●"/>
-              <a:defRPr sz="2200" b="0">
-                <a:solidFill>
-                  <a:srgbClr val="303437"/>
-                </a:solidFill>
-                <a:latin typeface="Noto Sans"/>
-              </a:defRPr>
-            </a:pPr>
-            <a:r>
-              <a:rPr sz="2200" b="0" lang="ja-JP" altLang="en-US">
-                <a:solidFill>
-                  <a:srgbClr val="303437"/>
-                </a:solidFill>
-                <a:latin typeface="Noto Sans"/>
-                <a:ea typeface="Noto Sans CJK JP"/>
-                <a:cs typeface="Noto Sans"/>
-              </a:rPr>
-              <a:t>Diamondの専門家検証90.7%には、選抜で正解がそろった最初の検証記録が含まれる。独立した新規受験者の成績とは異なる。</a:t>
-            </a:r>
-          </a:p>
-          <a:p>
-            <a:pPr marL="457200" indent="-355600">
-              <a:lnSpc>
-                <a:spcPts val="2640"/>
-              </a:lnSpc>
-              <a:spcAft>
-                <a:spcPts val="800"/>
-              </a:spcAft>
-              <a:buSzPct val="60455"/>
-              <a:buFont typeface="Noto Sans CJK JP"/>
-              <a:buChar char="●"/>
-              <a:defRPr sz="2200" b="0">
-                <a:solidFill>
-                  <a:srgbClr val="303437"/>
-                </a:solidFill>
-                <a:latin typeface="Noto Sans"/>
-              </a:defRPr>
-            </a:pPr>
-            <a:r>
-              <a:rPr sz="2200" b="0" lang="ja-JP" altLang="en-US">
-                <a:solidFill>
-                  <a:srgbClr val="303437"/>
-                </a:solidFill>
-                <a:latin typeface="Noto Sans"/>
-                <a:ea typeface="Noto Sans CJK JP"/>
-                <a:cs typeface="Noto Sans"/>
-              </a:rPr>
-              <a:t>分野外の回答者も、一般の無作為抽出された人々を意味するとは限らない。専門領域の違いと検証時の条件が関わる。</a:t>
-            </a:r>
-          </a:p>
-          <a:p>
-            <a:pPr marL="457200" indent="-355600">
-              <a:lnSpc>
-                <a:spcPts val="2640"/>
-              </a:lnSpc>
-              <a:spcAft>
-                <a:spcPts val="0"/>
-              </a:spcAft>
-              <a:buSzPct val="60455"/>
-              <a:buFont typeface="Noto Sans CJK JP"/>
-              <a:buChar char="●"/>
-              <a:defRPr sz="2200" b="0">
-                <a:solidFill>
-                  <a:srgbClr val="303437"/>
-                </a:solidFill>
-                <a:latin typeface="Noto Sans"/>
-              </a:defRPr>
-            </a:pPr>
-            <a:r>
-              <a:rPr sz="2200" b="0" lang="ja-JP" altLang="en-US">
-                <a:solidFill>
-                  <a:srgbClr val="303437"/>
-                </a:solidFill>
-                <a:latin typeface="Noto Sans"/>
-                <a:ea typeface="Noto Sans CJK JP"/>
-                <a:cs typeface="Noto Sans"/>
-              </a:rPr>
-              <a:t>モデルと人間を比べるときは、同じ設問だけでなく、参照できる情報、時間、選抜への利用も確認する。</a:t>
-            </a:r>
-          </a:p>
-        </p:txBody>
-      </p:sp>
-      <p:sp>
-        <p:nvSpPr>
-          <p:cNvPr id="4" name="Title 3"/>
-          <p:cNvSpPr>
-            <a:spLocks noGrp="1"/>
-          </p:cNvSpPr>
-          <p:nvPr>
-            <p:ph type="title" idx="2"/>
-          </p:nvPr>
-        </p:nvSpPr>
-        <p:spPr>
-          <a:xfrm>
-            <a:off x="75895" y="0"/>
-            <a:ext cx="8115300" cy="480060"/>
-          </a:xfrm>
-        </p:spPr>
-        <p:txBody>
-          <a:bodyPr wrap="square" lIns="0" rIns="0" tIns="0" bIns="0" anchor="ctr">
-            <a:noAutofit/>
-          </a:bodyPr>
-          <a:lstStyle/>
-          <a:p>
-            <a:pPr algn="l">
-              <a:lnSpc>
-                <a:spcPct val="110000"/>
-              </a:lnSpc>
-              <a:buNone/>
-              <a:defRPr sz="1400" b="0">
-                <a:solidFill>
-                  <a:srgbClr val="303437"/>
-                </a:solidFill>
-                <a:latin typeface="Noto Sans"/>
-              </a:defRPr>
-            </a:pPr>
-            <a:r>
-              <a:rPr sz="1400" b="1" lang="ja-JP" altLang="en-US">
-                <a:solidFill>
-                  <a:srgbClr val="FFFFFF"/>
-                </a:solidFill>
-                <a:latin typeface="Noto Sans"/>
-                <a:ea typeface="Noto Sans CJK JP"/>
-                <a:cs typeface="Noto Sans"/>
-              </a:rPr>
-              <a:t>Appendix: 1. 分布と評価条件</a:t>
-            </a:r>
-          </a:p>
-        </p:txBody>
-      </p:sp>
-      <p:sp>
-        <p:nvSpPr>
-          <p:cNvPr id="5" name="TextBox 4"/>
-          <p:cNvSpPr txBox="1"/>
-          <p:nvPr/>
-        </p:nvSpPr>
-        <p:spPr>
-          <a:xfrm>
-            <a:off x="502920" y="4690872"/>
-            <a:ext cx="8183879" cy="393192"/>
-          </a:xfrm>
-          <a:prstGeom prst="rect">
-            <a:avLst/>
-          </a:prstGeom>
-          <a:noFill/>
-        </p:spPr>
-        <p:txBody>
-          <a:bodyPr wrap="square" lIns="0" rIns="0" tIns="0" bIns="0">
-            <a:noAutofit/>
-          </a:bodyPr>
-          <a:lstStyle/>
-          <a:p>
-            <a:pPr algn="l">
-              <a:lnSpc>
-                <a:spcPct val="112000"/>
-              </a:lnSpc>
-              <a:spcBef>
-                <a:spcPts val="0"/>
-              </a:spcBef>
-              <a:spcAft>
-                <a:spcPts val="0"/>
-              </a:spcAft>
-              <a:buNone/>
-              <a:defRPr sz="810" b="0">
-                <a:solidFill>
-                  <a:srgbClr val="303437"/>
-                </a:solidFill>
-                <a:latin typeface="Noto Sans"/>
-              </a:defRPr>
-            </a:pPr>
-            <a:r>
-              <a:rPr sz="810" b="0" lang="ja-JP" altLang="en-US">
-                <a:solidFill>
-                  <a:srgbClr val="626669"/>
-                </a:solidFill>
-                <a:latin typeface="Noto Sans"/>
-                <a:ea typeface="Noto Sans CJK JP"/>
-                <a:cs typeface="Noto Sans"/>
-              </a:rPr>
-              <a:t/>
-            </a:r>
-            <a:r>
-              <a:rPr sz="810" b="0" lang="ja-JP" altLang="en-US">
-                <a:solidFill>
-                  <a:srgbClr val="626669"/>
-                </a:solidFill>
-                <a:latin typeface="Noto Sans"/>
-                <a:ea typeface="Noto Sans CJK JP"/>
-                <a:cs typeface="Noto Sans"/>
-              </a:rPr>
-              <a:t>Rein et al. (2024). GPQA: A Graduate-Level Google-Proof Q&amp;A Benchmark. COLM. 公式分析ノート。</a:t>
-            </a:r>
-            <a:r>
-              <a:rPr sz="810" b="0" lang="ja-JP" altLang="en-US">
-                <a:solidFill>
-                  <a:srgbClr val="626669"/>
-                </a:solidFill>
-                <a:latin typeface="Noto Sans"/>
-                <a:ea typeface="Noto Sans CJK JP"/>
-                <a:cs typeface="Noto Sans"/>
-              </a:rPr>
-              <a:t>  </a:t>
-            </a:r>
-            <a:r>
-              <a:rPr sz="810" b="0" lang="ja-JP" altLang="en-US">
-                <a:solidFill>
-                  <a:srgbClr val="626669"/>
-                </a:solidFill>
-                <a:latin typeface="Noto Sans"/>
-                <a:ea typeface="Noto Sans CJK JP"/>
-                <a:cs typeface="Noto Sans"/>
-                <a:hlinkClick r:id="rId2"/>
-              </a:rPr>
-              <a:t>https://github.com/idavidrein/gpqa/blob/main/GPQA_Analysis.ipynb</a:t>
-            </a:r>
-          </a:p>
-        </p:txBody>
-      </p:sp>
-    </p:spTree>
-  </p:cSld>
-  <p:clrMapOvr>
-    <a:masterClrMapping/>
-  </p:clrMapOvr>
-</p:sld>
-</file>
-
 <file path=ppt/slides/slide51.xml><?xml version="1.0" encoding="utf-8"?>
 <p:sld xmlns:a="http://schemas.openxmlformats.org/drawingml/2006/main" xmlns:p="http://schemas.openxmlformats.org/presentationml/2006/main" xmlns:r="http://schemas.openxmlformats.org/officeDocument/2006/relationships">
   <p:cSld>
@@ -29902,7 +28245,7 @@
                 <a:ea typeface="Noto Sans CJK JP"/>
                 <a:cs typeface="Noto Sans"/>
               </a:rPr>
-              <a:t>修正用フィールドを混同しない</a:t>
+              <a:t>配布CSVには複数の修正段階の列がある</a:t>
             </a:r>
           </a:p>
         </p:txBody>
@@ -29986,36 +28329,6 @@
                 <a:cs typeface="Noto Sans"/>
               </a:rPr>
               <a:t>OpenAIの公開実装が読むのはQuestion、Correct Answer、Incorrect Answer 1〜3である。</a:t>
-            </a:r>
-          </a:p>
-          <a:p>
-            <a:pPr marL="457200" indent="-355600">
-              <a:lnSpc>
-                <a:spcPts val="2640"/>
-              </a:lnSpc>
-              <a:spcAft>
-                <a:spcPts val="0"/>
-              </a:spcAft>
-              <a:buSzPct val="60455"/>
-              <a:buFont typeface="Noto Sans CJK JP"/>
-              <a:buChar char="●"/>
-              <a:defRPr sz="2200" b="0">
-                <a:solidFill>
-                  <a:srgbClr val="303437"/>
-                </a:solidFill>
-                <a:latin typeface="Noto Sans"/>
-              </a:defRPr>
-            </a:pPr>
-            <a:r>
-              <a:rPr sz="2200" b="0" lang="ja-JP" altLang="en-US">
-                <a:solidFill>
-                  <a:srgbClr val="303437"/>
-                </a:solidFill>
-                <a:latin typeface="Noto Sans"/>
-                <a:ea typeface="Noto Sans CJK JP"/>
-                <a:cs typeface="Noto Sans"/>
-              </a:rPr>
-              <a:t>別の列の修正版に置き換えた場合は、その評価対象を明記する。同じDiamondという名前だけで、入力が同一とは限らない。</a:t>
             </a:r>
           </a:p>
         </p:txBody>
@@ -30217,7 +28530,7 @@
                 <a:ea typeface="Noto Sans CJK JP"/>
                 <a:cs typeface="Noto Sans"/>
               </a:rPr>
-              <a:t>小数点の差と不確かさ</a:t>
+              <a:t>198問の二項近似による標準誤差の計算例</a:t>
             </a:r>
           </a:p>
         </p:txBody>
@@ -30301,36 +28614,6 @@
                 <a:cs typeface="DejaVu Sans"/>
               </a:rPr>
               <a:t>計算は√(0.96×0.04÷198)×100。正規近似の95%幅はおよそ±2.7ポイントである。</a:t>
-            </a:r>
-          </a:p>
-          <a:p>
-            <a:pPr marL="457200" indent="-355600">
-              <a:lnSpc>
-                <a:spcPts val="2640"/>
-              </a:lnSpc>
-              <a:spcAft>
-                <a:spcPts val="0"/>
-              </a:spcAft>
-              <a:buSzPct val="60455"/>
-              <a:buFont typeface="Noto Sans CJK JP"/>
-              <a:buChar char="●"/>
-              <a:defRPr sz="2200" b="0">
-                <a:solidFill>
-                  <a:srgbClr val="303437"/>
-                </a:solidFill>
-                <a:latin typeface="Noto Sans"/>
-              </a:defRPr>
-            </a:pPr>
-            <a:r>
-              <a:rPr sz="2200" b="0" lang="ja-JP" altLang="en-US">
-                <a:solidFill>
-                  <a:srgbClr val="303437"/>
-                </a:solidFill>
-                <a:latin typeface="Noto Sans"/>
-                <a:ea typeface="Noto Sans CJK JP"/>
-                <a:cs typeface="Noto Sans"/>
-              </a:rPr>
-              <a:t>これは説明用の二項近似で、掲載モデルの信頼区間ではない。同じ問題への反復や、モデル間の対応を使った比較は別に扱う。</a:t>
             </a:r>
           </a:p>
         </p:txBody>
@@ -30528,36 +28811,6 @@
                 <a:cs typeface="Noto Sans"/>
               </a:rPr>
               <a:t>公開された集約コードは、同じモデルの複数ランのmean_scoreを平均し、百分率へ換算している。</a:t>
-            </a:r>
-          </a:p>
-          <a:p>
-            <a:pPr marL="457200" indent="-355600">
-              <a:lnSpc>
-                <a:spcPts val="2640"/>
-              </a:lnSpc>
-              <a:spcAft>
-                <a:spcPts val="0"/>
-              </a:spcAft>
-              <a:buSzPct val="60455"/>
-              <a:buFont typeface="Noto Sans CJK JP"/>
-              <a:buChar char="●"/>
-              <a:defRPr sz="2200" b="0">
-                <a:solidFill>
-                  <a:srgbClr val="303437"/>
-                </a:solidFill>
-                <a:latin typeface="Noto Sans"/>
-              </a:defRPr>
-            </a:pPr>
-            <a:r>
-              <a:rPr sz="2200" b="0" lang="ja-JP" altLang="en-US">
-                <a:solidFill>
-                  <a:srgbClr val="303437"/>
-                </a:solidFill>
-                <a:latin typeface="Noto Sans"/>
-                <a:ea typeface="Noto Sans CJK JP"/>
-                <a:cs typeface="Noto Sans"/>
-              </a:rPr>
-              <a:t>この資料では一次CSVを取得できず、試行別条件までは照合していない。一次表を確認した確定順位として扱わない。</a:t>
             </a:r>
           </a:p>
         </p:txBody>
@@ -32124,7 +30377,7 @@
                 <a:ea typeface="Noto Sans CJK JP"/>
                 <a:cs typeface="Noto Sans"/>
               </a:rPr>
-              <a:t>状態の係数をそのまま確率として使わず、演算子を状態に作用させて内積を取る。</a:t>
+              <a:t>演算子を状態に作用させて内積を取る。</a:t>
             </a:r>
           </a:p>
           <a:p>
@@ -38266,7 +36519,7 @@
                 <a:ea typeface="Noto Sans CJK JP"/>
                 <a:cs typeface="Noto Sans"/>
               </a:rPr>
-              <a:t>配布正解は設問内のc、地球と同じ組成で質量が5倍の惑星。外側の四択ラベルと設問内のa〜dを区別する必要がある。</a:t>
+              <a:t>配布正解は設問内のc、地球と同じ組成で質量が5倍の惑星。</a:t>
             </a:r>
           </a:p>
         </p:txBody>
@@ -43152,7 +41405,7 @@
                 <a:ea typeface="Noto Sans CJK JP"/>
                 <a:cs typeface="Noto Sans"/>
               </a:rPr>
-              <a:t>配布正解は「weaker - slower」。反応速度は反応経路にも依存するため、ここでは設問と配布解説が想定する文脈に沿った正解として扱う。</a:t>
+              <a:t>配布正解は「weaker - slower」。</a:t>
             </a:r>
           </a:p>
         </p:txBody>
@@ -48985,37 +47238,7 @@
                 <a:ea typeface="Noto Sans CJK JP"/>
                 <a:cs typeface="Noto Sans"/>
               </a:rPr>
-              <a:t>その公開資料は、GPQA Diamondから一部を除外した修正版も提示する。これは元の198問とは異なる評価集合になる。</a:t>
-            </a:r>
-          </a:p>
-          <a:p>
-            <a:pPr marL="457200" indent="-355600">
-              <a:lnSpc>
-                <a:spcPts val="2640"/>
-              </a:lnSpc>
-              <a:spcAft>
-                <a:spcPts val="0"/>
-              </a:spcAft>
-              <a:buSzPct val="60455"/>
-              <a:buFont typeface="Noto Sans CJK JP"/>
-              <a:buChar char="●"/>
-              <a:defRPr sz="2200" b="0">
-                <a:solidFill>
-                  <a:srgbClr val="303437"/>
-                </a:solidFill>
-                <a:latin typeface="Noto Sans"/>
-              </a:defRPr>
-            </a:pPr>
-            <a:r>
-              <a:rPr sz="2200" b="0" lang="ja-JP" altLang="en-US">
-                <a:solidFill>
-                  <a:srgbClr val="303437"/>
-                </a:solidFill>
-                <a:latin typeface="Noto Sans"/>
-                <a:ea typeface="Noto Sans CJK JP"/>
-                <a:cs typeface="Noto Sans"/>
-              </a:rPr>
-              <a:t>監査側も、人間が全件を認証した結果ではないと明記する。修正版を使う場合は、元の正解率と区別して報告する。</a:t>
+              <a:t>その公開資料は、GPQA Diamondから一部を除外した修正版も提示する。</a:t>
             </a:r>
           </a:p>
         </p:txBody>

--- a/slides/datasets-in-10-minutes-gpqa.pptx
+++ b/slides/datasets-in-10-minutes-gpqa.pptx
@@ -9162,7 +9162,7 @@
                 <a:ea typeface="Noto Sans CJK JP"/>
                 <a:cs typeface="Noto Sans"/>
               </a:rPr>
-              <a:t>この会話では、極性が似た化合物のスポットが重なり、分離しにくいことを指す。</a:t>
+              <a:t>この会話は、極性が似た化合物のスポットが重なり、分離しにくい状況を指している。</a:t>
             </a:r>
           </a:p>
         </p:txBody>
@@ -16637,7 +16637,7 @@
                 <a:ea typeface="Noto Sans CJK JP"/>
                 <a:cs typeface="Noto Sans"/>
               </a:rPr>
-              <a:t>Diamondを選ぶ専門家の検証記録</a:t>
+              <a:t>Diamond選定における専門家の検証記録</a:t>
             </a:r>
           </a:p>
         </p:txBody>
@@ -16720,7 +16720,7 @@
                 <a:ea typeface="Noto Sans CJK JP"/>
                 <a:cs typeface="Noto Sans"/>
               </a:rPr>
-              <a:t>配布CSVでは、Diamondの198問すべてで最初の専門家検証が正解し、2回目の専門家検証は161問で正解している。</a:t>
+              <a:t>配布CSVでは、Diamondの198問すべてで最初の専門家検証が正解となり、2回目の専門家検証では161問が正解となっている。</a:t>
             </a:r>
           </a:p>
         </p:txBody>
@@ -18682,7 +18682,7 @@
                 <a:ea typeface="Noto Sans CJK JP"/>
                 <a:cs typeface="Noto Sans"/>
               </a:rPr>
-              <a:t>質問文の長さの分布</a:t>
+              <a:t>Diamondの質問文の長さの分布</a:t>
             </a:r>
           </a:p>
         </p:txBody>
@@ -19693,7 +19693,7 @@
                 <a:ea typeface="Noto Sans CJK JP"/>
                 <a:cs typeface="Noto Sans"/>
               </a:rPr>
-              <a:t>各応答は一つの選択肢として採点され、792応答の平均正解率を求める。</a:t>
+              <a:t>各応答で選ばれた一つの選択肢を採点し、全792件の平均正解率を求める。</a:t>
             </a:r>
           </a:p>
         </p:txBody>
@@ -20554,7 +20554,7 @@
                           <a:ea typeface="Noto Sans CJK JP"/>
                           <a:cs typeface="Noto Sans"/>
                         </a:rPr>
-                        <a:t>公式READMEがHugging Face版にも案内している。</a:t>
+                        <a:t>公式READMEでもHugging Face版が案内されている。</a:t>
                       </a:r>
                     </a:p>
                   </a:txBody>
@@ -29353,7 +29353,7 @@
                 <a:ea typeface="Noto Sans CJK JP"/>
                 <a:cs typeface="Noto Sans"/>
               </a:rPr>
-              <a:t>要旨：上向きと下向きの状態が重なった粒子について、指定された観測量の期待値を計算する。</a:t>
+              <a:t>要旨：上向きと下向きの重ね合わせ状態にある粒子について、指定された観測量の期待値を計算する。</a:t>
             </a:r>
           </a:p>
         </p:txBody>
@@ -30990,7 +30990,7 @@
                 <a:ea typeface="Noto Sans CJK JP"/>
                 <a:cs typeface="Noto Sans"/>
               </a:rPr>
-              <a:t>一つの問題で与えられるもの</a:t>
+              <a:t>問題の構成と評価方法</a:t>
             </a:r>
           </a:p>
         </p:txBody>
@@ -36489,7 +36489,7 @@
                 <a:ea typeface="Noto Sans CJK JP"/>
                 <a:cs typeface="Noto Sans"/>
               </a:rPr>
-              <a:t>同じ組成でも、質量が大きい岩石惑星では自分自身の重力による圧縮が強くなる。</a:t>
+              <a:t>同じ組成でも、質量が大きい岩石惑星では自分自身の重力による圧縮が強くなり、平均密度が高くなる。</a:t>
             </a:r>
           </a:p>
           <a:p>
@@ -38812,7 +38812,7 @@
                 <a:ea typeface="Noto Sans CJK JP"/>
                 <a:cs typeface="Noto Sans"/>
               </a:rPr>
-              <a:t>要旨：0.02 MのCa–EDTA錯体と生成定数から、自由なカルシウムイオンの濃度を求める。</a:t>
+              <a:t>要旨：0.02 MのCa–EDTA錯体と生成定数から、遊離カルシウムイオンの濃度を求める。</a:t>
             </a:r>
           </a:p>
         </p:txBody>
@@ -45300,7 +45300,7 @@
                 <a:ea typeface="Noto Sans CJK JP"/>
                 <a:cs typeface="Noto Sans"/>
               </a:rPr>
-              <a:t>一つのピークに対応する官能基だけでなく、複数の測定条件を同時に満たす構造を選ぶ。配布正解はethyl 4-aminobenzoateである。</a:t>
+              <a:t>一つのピークに対応する官能基だけでなく、複数の測定結果を同時に満たす構造を選ぶ。配布正解はethyl 4-aminobenzoateである。</a:t>
             </a:r>
           </a:p>
         </p:txBody>

--- a/slides/datasets-in-10-minutes-gpqa.pptx
+++ b/slides/datasets-in-10-minutes-gpqa.pptx
@@ -8882,7 +8882,7 @@
         <p:spPr>
           <a:xfrm>
             <a:off x="594360" y="4119880"/>
-            <a:ext cx="7955279" cy="347472"/>
+            <a:ext cx="7955279" cy="424645"/>
           </a:xfrm>
           <a:prstGeom prst="rect">
             <a:avLst/>
@@ -8916,7 +8916,7 @@
             <a:r>
               <a:rPr sz="2100" b="1" lang="ja-JP" altLang="en-US">
                 <a:solidFill>
-                  <a:srgbClr val="B13731"/>
+                  <a:schemeClr val="accent1"/>
                 </a:solidFill>
                 <a:latin typeface="Noto Sans"/>
                 <a:ea typeface="Noto Sans CJK JP"/>
@@ -11240,7 +11240,7 @@
         <p:spPr>
           <a:xfrm>
             <a:off x="594360" y="3767328"/>
-            <a:ext cx="7955279" cy="347472"/>
+            <a:ext cx="7955279" cy="424759"/>
           </a:xfrm>
           <a:prstGeom prst="rect">
             <a:avLst/>
@@ -11274,7 +11274,7 @@
             <a:r>
               <a:rPr sz="2100" b="1" lang="ja-JP" altLang="en-US">
                 <a:solidFill>
-                  <a:srgbClr val="B13731"/>
+                  <a:schemeClr val="accent1"/>
                 </a:solidFill>
                 <a:latin typeface="Noto Sans"/>
                 <a:ea typeface="Noto Sans CJK JP"/>
@@ -30127,7 +30127,7 @@
         <p:spPr>
           <a:xfrm>
             <a:off x="594360" y="3767328"/>
-            <a:ext cx="7955279" cy="347472"/>
+            <a:ext cx="7955279" cy="424759"/>
           </a:xfrm>
           <a:prstGeom prst="rect">
             <a:avLst/>
@@ -30161,7 +30161,7 @@
             <a:r>
               <a:rPr sz="2100" b="1" lang="ja-JP" altLang="en-US">
                 <a:solidFill>
-                  <a:srgbClr val="B13731"/>
+                  <a:schemeClr val="accent1"/>
                 </a:solidFill>
                 <a:latin typeface="Noto Sans"/>
                 <a:ea typeface="Noto Sans CJK JP"/>
@@ -31610,7 +31610,7 @@
         <p:spPr>
           <a:xfrm>
             <a:off x="594360" y="4169156"/>
-            <a:ext cx="7955279" cy="347472"/>
+            <a:ext cx="7955279" cy="424683"/>
           </a:xfrm>
           <a:prstGeom prst="rect">
             <a:avLst/>
@@ -31644,7 +31644,7 @@
             <a:r>
               <a:rPr sz="2100" b="1" lang="ja-JP" altLang="en-US">
                 <a:solidFill>
-                  <a:srgbClr val="B13731"/>
+                  <a:schemeClr val="accent1"/>
                 </a:solidFill>
                 <a:latin typeface="Noto Sans"/>
                 <a:ea typeface="Noto Sans CJK JP"/>
@@ -33121,7 +33121,7 @@
         <p:spPr>
           <a:xfrm>
             <a:off x="594360" y="3767328"/>
-            <a:ext cx="7955279" cy="347472"/>
+            <a:ext cx="7955279" cy="424759"/>
           </a:xfrm>
           <a:prstGeom prst="rect">
             <a:avLst/>
@@ -33155,7 +33155,7 @@
             <a:r>
               <a:rPr sz="2100" b="1" lang="ja-JP" altLang="en-US">
                 <a:solidFill>
-                  <a:srgbClr val="B13731"/>
+                  <a:schemeClr val="accent1"/>
                 </a:solidFill>
                 <a:latin typeface="Noto Sans"/>
                 <a:ea typeface="Noto Sans CJK JP"/>
@@ -36239,7 +36239,7 @@
         <p:spPr>
           <a:xfrm>
             <a:off x="594360" y="3767328"/>
-            <a:ext cx="7955279" cy="347472"/>
+            <a:ext cx="7955279" cy="424759"/>
           </a:xfrm>
           <a:prstGeom prst="rect">
             <a:avLst/>
@@ -36273,7 +36273,7 @@
             <a:r>
               <a:rPr sz="2100" b="1" lang="ja-JP" altLang="en-US">
                 <a:solidFill>
-                  <a:srgbClr val="B13731"/>
+                  <a:schemeClr val="accent1"/>
                 </a:solidFill>
                 <a:latin typeface="Noto Sans"/>
                 <a:ea typeface="Noto Sans CJK JP"/>
@@ -37722,7 +37722,7 @@
         <p:spPr>
           <a:xfrm>
             <a:off x="594360" y="3767328"/>
-            <a:ext cx="7955279" cy="347472"/>
+            <a:ext cx="7955279" cy="424759"/>
           </a:xfrm>
           <a:prstGeom prst="rect">
             <a:avLst/>
@@ -37756,7 +37756,7 @@
             <a:r>
               <a:rPr sz="2100" b="1" lang="ja-JP" altLang="en-US">
                 <a:solidFill>
-                  <a:srgbClr val="B13731"/>
+                  <a:schemeClr val="accent1"/>
                 </a:solidFill>
                 <a:latin typeface="Noto Sans"/>
                 <a:ea typeface="Noto Sans CJK JP"/>
@@ -39205,7 +39205,7 @@
         <p:spPr>
           <a:xfrm>
             <a:off x="594360" y="3767328"/>
-            <a:ext cx="7955279" cy="347472"/>
+            <a:ext cx="7955279" cy="424759"/>
           </a:xfrm>
           <a:prstGeom prst="rect">
             <a:avLst/>
@@ -39239,7 +39239,7 @@
             <a:r>
               <a:rPr sz="2100" b="1" lang="ja-JP" altLang="en-US">
                 <a:solidFill>
-                  <a:srgbClr val="B13731"/>
+                  <a:schemeClr val="accent1"/>
                 </a:solidFill>
                 <a:latin typeface="Noto Sans"/>
                 <a:ea typeface="Noto Sans CJK JP"/>
@@ -41125,7 +41125,7 @@
         <p:spPr>
           <a:xfrm>
             <a:off x="594360" y="3767328"/>
-            <a:ext cx="7955279" cy="347472"/>
+            <a:ext cx="7955279" cy="424759"/>
           </a:xfrm>
           <a:prstGeom prst="rect">
             <a:avLst/>
@@ -41159,7 +41159,7 @@
             <a:r>
               <a:rPr sz="2100" b="1" lang="ja-JP" altLang="en-US">
                 <a:solidFill>
-                  <a:srgbClr val="B13731"/>
+                  <a:schemeClr val="accent1"/>
                 </a:solidFill>
                 <a:latin typeface="Noto Sans"/>
                 <a:ea typeface="Noto Sans CJK JP"/>
@@ -42636,7 +42636,7 @@
         <p:spPr>
           <a:xfrm>
             <a:off x="594360" y="3767328"/>
-            <a:ext cx="7955279" cy="347472"/>
+            <a:ext cx="7955279" cy="424759"/>
           </a:xfrm>
           <a:prstGeom prst="rect">
             <a:avLst/>
@@ -42670,7 +42670,7 @@
             <a:r>
               <a:rPr sz="2100" b="1" lang="ja-JP" altLang="en-US">
                 <a:solidFill>
-                  <a:srgbClr val="B13731"/>
+                  <a:schemeClr val="accent1"/>
                 </a:solidFill>
                 <a:latin typeface="Noto Sans"/>
                 <a:ea typeface="Noto Sans CJK JP"/>
@@ -44203,7 +44203,7 @@
         <p:spPr>
           <a:xfrm>
             <a:off x="594360" y="3767328"/>
-            <a:ext cx="7955279" cy="347472"/>
+            <a:ext cx="7955279" cy="424759"/>
           </a:xfrm>
           <a:prstGeom prst="rect">
             <a:avLst/>
@@ -44237,7 +44237,7 @@
             <a:r>
               <a:rPr sz="2100" b="1" lang="ja-JP" altLang="en-US">
                 <a:solidFill>
-                  <a:srgbClr val="B13731"/>
+                  <a:schemeClr val="accent1"/>
                 </a:solidFill>
                 <a:latin typeface="Noto Sans"/>
                 <a:ea typeface="Noto Sans CJK JP"/>
@@ -45305,7 +45305,7 @@
         <p:spPr>
           <a:xfrm>
             <a:off x="594360" y="3767328"/>
-            <a:ext cx="7955279" cy="347472"/>
+            <a:ext cx="7955279" cy="424759"/>
           </a:xfrm>
           <a:prstGeom prst="rect">
             <a:avLst/>
@@ -45339,7 +45339,7 @@
             <a:r>
               <a:rPr sz="2100" b="1" lang="ja-JP" altLang="en-US">
                 <a:solidFill>
-                  <a:srgbClr val="B13731"/>
+                  <a:schemeClr val="accent1"/>
                 </a:solidFill>
                 <a:latin typeface="Noto Sans"/>
                 <a:ea typeface="Noto Sans CJK JP"/>
@@ -46559,7 +46559,7 @@
         <p:spPr>
           <a:xfrm>
             <a:off x="594360" y="3767328"/>
-            <a:ext cx="7955279" cy="347472"/>
+            <a:ext cx="7955279" cy="424759"/>
           </a:xfrm>
           <a:prstGeom prst="rect">
             <a:avLst/>
@@ -46593,7 +46593,7 @@
             <a:r>
               <a:rPr sz="2100" b="1" lang="ja-JP" altLang="en-US">
                 <a:solidFill>
-                  <a:srgbClr val="B13731"/>
+                  <a:schemeClr val="accent1"/>
                 </a:solidFill>
                 <a:latin typeface="Noto Sans"/>
                 <a:ea typeface="Noto Sans CJK JP"/>
